--- a/军民融合/ppt/1.pptx
+++ b/军民融合/ppt/1.pptx
@@ -3887,31 +3887,6 @@
       </p:sp>
       <p:sp>
         <p:nvSpPr>
-          <p:cNvPr id="83" name="sea-band"/>
-          <p:cNvSpPr>
-            <a:spLocks noGrp="1"/>
-          </p:cNvSpPr>
-          <p:nvPr/>
-        </p:nvSpPr>
-        <p:spPr>
-          <a:xfrm>
-            <a:off x="1847850" y="1619250"/>
-            <a:ext cx="2905125" cy="914400"/>
-          </a:xfrm>
-          <a:prstGeom prst="rect">
-            <a:avLst/>
-          </a:prstGeom>
-          <a:solidFill>
-            <a:srgbClr val="D9ECFF"/>
-          </a:solidFill>
-          <a:ln w="0">
-            <a:noFill/>
-            <a:prstDash val="solid"/>
-          </a:ln>
-        </p:spPr>
-      </p:sp>
-      <p:sp>
-        <p:nvSpPr>
           <p:cNvPr id="84" name="sea-wave-1-1"/>
           <p:cNvSpPr>
             <a:spLocks noGrp="1"/>
@@ -6005,254 +5980,6 @@
           <a:ln w="10478">
             <a:solidFill>
               <a:srgbClr val="7EA2D8"/>
-            </a:solidFill>
-            <a:prstDash val="solid"/>
-          </a:ln>
-        </p:spPr>
-      </p:sp>
-      <p:sp>
-        <p:nvSpPr>
-          <p:cNvPr id="169" name="coast-guard-hull"/>
-          <p:cNvSpPr>
-            <a:spLocks noGrp="1"/>
-          </p:cNvSpPr>
-          <p:nvPr/>
-        </p:nvSpPr>
-        <p:spPr>
-          <a:xfrm>
-            <a:off x="2019300" y="2333625"/>
-            <a:ext cx="546735" cy="203073"/>
-          </a:xfrm>
-          <a:custGeom>
-            <a:avLst/>
-            <a:gdLst/>
-            <a:ahLst/>
-            <a:cxnLst/>
-            <a:pathLst>
-              <a:path w="546735" h="203073">
-                <a:moveTo>
-                  <a:pt x="0" y="0"/>
-                </a:moveTo>
-                <a:lnTo>
-                  <a:pt x="484251" y="0"/>
-                </a:lnTo>
-                <a:lnTo>
-                  <a:pt x="390525" y="156210"/>
-                </a:lnTo>
-                <a:lnTo>
-                  <a:pt x="93726" y="156210"/>
-                </a:lnTo>
-                <a:close/>
-              </a:path>
-            </a:pathLst>
-          </a:custGeom>
-          <a:solidFill>
-            <a:srgbClr val="2E54A1"/>
-          </a:solidFill>
-          <a:ln w="9525">
-            <a:solidFill>
-              <a:srgbClr val="2E54A1"/>
-            </a:solidFill>
-            <a:prstDash val="solid"/>
-          </a:ln>
-        </p:spPr>
-      </p:sp>
-      <p:sp>
-        <p:nvSpPr>
-          <p:cNvPr id="170" name="coast-guard-cabin"/>
-          <p:cNvSpPr>
-            <a:spLocks noGrp="1"/>
-          </p:cNvSpPr>
-          <p:nvPr/>
-        </p:nvSpPr>
-        <p:spPr>
-          <a:xfrm>
-            <a:off x="2222373" y="2130552"/>
-            <a:ext cx="156210" cy="203073"/>
-          </a:xfrm>
-          <a:prstGeom prst="rect">
-            <a:avLst/>
-          </a:prstGeom>
-          <a:noFill/>
-          <a:ln w="16193">
-            <a:solidFill>
-              <a:srgbClr val="2E54A1"/>
-            </a:solidFill>
-            <a:prstDash val="solid"/>
-          </a:ln>
-        </p:spPr>
-      </p:sp>
-      <p:sp>
-        <p:nvSpPr>
-          <p:cNvPr id="171" name="coast-guard-mast"/>
-          <p:cNvSpPr>
-            <a:spLocks noGrp="1"/>
-          </p:cNvSpPr>
-          <p:nvPr/>
-        </p:nvSpPr>
-        <p:spPr>
-          <a:xfrm>
-            <a:off x="2378583" y="1927479"/>
-            <a:ext cx="0" cy="203073"/>
-          </a:xfrm>
-          <a:prstGeom prst="line">
-            <a:avLst/>
-          </a:prstGeom>
-          <a:noFill/>
-          <a:ln w="17145">
-            <a:solidFill>
-              <a:srgbClr val="2E54A1"/>
-            </a:solidFill>
-            <a:prstDash val="solid"/>
-          </a:ln>
-        </p:spPr>
-      </p:sp>
-      <p:sp>
-        <p:nvSpPr>
-          <p:cNvPr id="172" name="coast-guard-antenna"/>
-          <p:cNvSpPr>
-            <a:spLocks noGrp="1"/>
-          </p:cNvSpPr>
-          <p:nvPr/>
-        </p:nvSpPr>
-        <p:spPr>
-          <a:xfrm>
-            <a:off x="2355152" y="1888427"/>
-            <a:ext cx="54673" cy="54673"/>
-          </a:xfrm>
-          <a:prstGeom prst="ellipse">
-            <a:avLst/>
-          </a:prstGeom>
-          <a:solidFill>
-            <a:srgbClr val="2E54A1"/>
-          </a:solidFill>
-          <a:ln w="0">
-            <a:solidFill>
-              <a:srgbClr val="2E54A1"/>
-            </a:solidFill>
-            <a:prstDash val="solid"/>
-          </a:ln>
-        </p:spPr>
-      </p:sp>
-      <p:sp>
-        <p:nvSpPr>
-          <p:cNvPr id="173" name="suspect-boat-hull"/>
-          <p:cNvSpPr>
-            <a:spLocks noGrp="1"/>
-          </p:cNvSpPr>
-          <p:nvPr/>
-        </p:nvSpPr>
-        <p:spPr>
-          <a:xfrm>
-            <a:off x="4048125" y="2324100"/>
-            <a:ext cx="433388" cy="160973"/>
-          </a:xfrm>
-          <a:custGeom>
-            <a:avLst/>
-            <a:gdLst/>
-            <a:ahLst/>
-            <a:cxnLst/>
-            <a:pathLst>
-              <a:path w="433388" h="160973">
-                <a:moveTo>
-                  <a:pt x="0" y="0"/>
-                </a:moveTo>
-                <a:lnTo>
-                  <a:pt x="383858" y="0"/>
-                </a:lnTo>
-                <a:lnTo>
-                  <a:pt x="309563" y="123825"/>
-                </a:lnTo>
-                <a:lnTo>
-                  <a:pt x="74295" y="123825"/>
-                </a:lnTo>
-                <a:close/>
-              </a:path>
-            </a:pathLst>
-          </a:custGeom>
-          <a:solidFill>
-            <a:srgbClr val="C00000"/>
-          </a:solidFill>
-          <a:ln w="9525">
-            <a:solidFill>
-              <a:srgbClr val="C00000"/>
-            </a:solidFill>
-            <a:prstDash val="solid"/>
-          </a:ln>
-        </p:spPr>
-      </p:sp>
-      <p:sp>
-        <p:nvSpPr>
-          <p:cNvPr id="174" name="suspect-boat-cabin"/>
-          <p:cNvSpPr>
-            <a:spLocks noGrp="1"/>
-          </p:cNvSpPr>
-          <p:nvPr/>
-        </p:nvSpPr>
-        <p:spPr>
-          <a:xfrm>
-            <a:off x="4209098" y="2163128"/>
-            <a:ext cx="123825" cy="160973"/>
-          </a:xfrm>
-          <a:prstGeom prst="rect">
-            <a:avLst/>
-          </a:prstGeom>
-          <a:noFill/>
-          <a:ln w="16193">
-            <a:solidFill>
-              <a:srgbClr val="C00000"/>
-            </a:solidFill>
-            <a:prstDash val="solid"/>
-          </a:ln>
-        </p:spPr>
-      </p:sp>
-      <p:sp>
-        <p:nvSpPr>
-          <p:cNvPr id="175" name="suspect-boat-mast"/>
-          <p:cNvSpPr>
-            <a:spLocks noGrp="1"/>
-          </p:cNvSpPr>
-          <p:nvPr/>
-        </p:nvSpPr>
-        <p:spPr>
-          <a:xfrm>
-            <a:off x="4332923" y="2002155"/>
-            <a:ext cx="0" cy="160973"/>
-          </a:xfrm>
-          <a:prstGeom prst="line">
-            <a:avLst/>
-          </a:prstGeom>
-          <a:noFill/>
-          <a:ln w="17145">
-            <a:solidFill>
-              <a:srgbClr val="C00000"/>
-            </a:solidFill>
-            <a:prstDash val="solid"/>
-          </a:ln>
-        </p:spPr>
-      </p:sp>
-      <p:sp>
-        <p:nvSpPr>
-          <p:cNvPr id="176" name="suspect-boat-antenna"/>
-          <p:cNvSpPr>
-            <a:spLocks noGrp="1"/>
-          </p:cNvSpPr>
-          <p:nvPr/>
-        </p:nvSpPr>
-        <p:spPr>
-          <a:xfrm>
-            <a:off x="4314349" y="1971199"/>
-            <a:ext cx="43339" cy="43339"/>
-          </a:xfrm>
-          <a:prstGeom prst="ellipse">
-            <a:avLst/>
-          </a:prstGeom>
-          <a:solidFill>
-            <a:srgbClr val="C00000"/>
-          </a:solidFill>
-          <a:ln w="0">
-            <a:solidFill>
-              <a:srgbClr val="C00000"/>
             </a:solidFill>
             <a:prstDash val="solid"/>
           </a:ln>
@@ -6326,8 +6053,8 @@
         </p:nvSpPr>
         <p:spPr>
           <a:xfrm>
-            <a:off x="1790700" y="2686050"/>
-            <a:ext cx="2914650" cy="142875"/>
+            <a:off x="1790700" y="2703195"/>
+            <a:ext cx="2914650" cy="125730"/>
           </a:xfrm>
           <a:prstGeom prst="rect">
             <a:avLst/>
@@ -6385,7 +6112,7 @@
         <p:spPr>
           <a:xfrm>
             <a:off x="5676900" y="1181100"/>
-            <a:ext cx="3886200" cy="171450"/>
+            <a:ext cx="4070985" cy="171450"/>
           </a:xfrm>
           <a:prstGeom prst="rect">
             <a:avLst/>
@@ -6419,9 +6146,42 @@
                 <a:ea typeface="微软雅黑" panose="020B0503020204020204" charset="-122"/>
                 <a:cs typeface="微软雅黑" panose="020B0503020204020204" charset="-122"/>
               </a:rPr>
-              <a:t>强海杂波与复杂传播共同制约弱目标显现</a:t>
-            </a:r>
-            <a:endParaRPr sz="1600" b="1">
+              <a:t>强海杂波与复杂传播共同制约</a:t>
+            </a:r>
+            <a:r>
+              <a:rPr lang="zh-CN" sz="1600" b="1">
+                <a:solidFill>
+                  <a:srgbClr val="C00000"/>
+                </a:solidFill>
+                <a:latin typeface="微软雅黑" panose="020B0503020204020204" charset="-122"/>
+                <a:ea typeface="微软雅黑" panose="020B0503020204020204" charset="-122"/>
+                <a:cs typeface="微软雅黑" panose="020B0503020204020204" charset="-122"/>
+              </a:rPr>
+              <a:t>微</a:t>
+            </a:r>
+            <a:r>
+              <a:rPr sz="1600" b="1">
+                <a:solidFill>
+                  <a:srgbClr val="C00000"/>
+                </a:solidFill>
+                <a:latin typeface="微软雅黑" panose="020B0503020204020204" charset="-122"/>
+                <a:ea typeface="微软雅黑" panose="020B0503020204020204" charset="-122"/>
+                <a:cs typeface="微软雅黑" panose="020B0503020204020204" charset="-122"/>
+              </a:rPr>
+              <a:t>弱目标</a:t>
+            </a:r>
+            <a:r>
+              <a:rPr lang="zh-CN" sz="1600" b="1">
+                <a:solidFill>
+                  <a:srgbClr val="C00000"/>
+                </a:solidFill>
+                <a:latin typeface="微软雅黑" panose="020B0503020204020204" charset="-122"/>
+                <a:ea typeface="微软雅黑" panose="020B0503020204020204" charset="-122"/>
+                <a:cs typeface="微软雅黑" panose="020B0503020204020204" charset="-122"/>
+              </a:rPr>
+              <a:t>信号</a:t>
+            </a:r>
+            <a:endParaRPr lang="zh-CN" sz="1600" b="1">
               <a:solidFill>
                 <a:srgbClr val="C00000"/>
               </a:solidFill>
@@ -6442,7 +6202,7 @@
         </p:nvSpPr>
         <p:spPr>
           <a:xfrm>
-            <a:off x="5753100" y="1672590"/>
+            <a:off x="5824855" y="1672590"/>
             <a:ext cx="1028700" cy="228600"/>
           </a:xfrm>
           <a:prstGeom prst="roundRect">
@@ -6471,7 +6231,7 @@
         </p:nvSpPr>
         <p:spPr>
           <a:xfrm>
-            <a:off x="5791200" y="1648460"/>
+            <a:off x="5862955" y="1648460"/>
             <a:ext cx="952500" cy="114300"/>
           </a:xfrm>
           <a:prstGeom prst="rect">
@@ -6529,7 +6289,7 @@
         </p:nvSpPr>
         <p:spPr>
           <a:xfrm>
-            <a:off x="6896100" y="1672590"/>
+            <a:off x="7039610" y="1672590"/>
             <a:ext cx="1028700" cy="228600"/>
           </a:xfrm>
           <a:prstGeom prst="roundRect">
@@ -6558,8 +6318,8 @@
         </p:nvSpPr>
         <p:spPr>
           <a:xfrm>
-            <a:off x="6934200" y="1648460"/>
-            <a:ext cx="952500" cy="114300"/>
+            <a:off x="7077710" y="1648460"/>
+            <a:ext cx="952500" cy="253365"/>
           </a:xfrm>
           <a:prstGeom prst="rect">
             <a:avLst/>
@@ -6616,7 +6376,7 @@
         </p:nvSpPr>
         <p:spPr>
           <a:xfrm>
-            <a:off x="8039100" y="1672590"/>
+            <a:off x="8254365" y="1672590"/>
             <a:ext cx="1028700" cy="228600"/>
           </a:xfrm>
           <a:prstGeom prst="roundRect">
@@ -6645,7 +6405,7 @@
         </p:nvSpPr>
         <p:spPr>
           <a:xfrm>
-            <a:off x="8077200" y="1648460"/>
+            <a:off x="8292465" y="1648460"/>
             <a:ext cx="952500" cy="114300"/>
           </a:xfrm>
           <a:prstGeom prst="rect">
@@ -6991,7 +6751,7 @@
         </p:nvSpPr>
         <p:spPr>
           <a:xfrm>
-            <a:off x="5400040" y="2511425"/>
+            <a:off x="5400040" y="2583180"/>
             <a:ext cx="4552950" cy="296545"/>
           </a:xfrm>
           <a:prstGeom prst="rect">
@@ -8351,7 +8111,7 @@
         <p:spPr>
           <a:xfrm>
             <a:off x="1674495" y="5915025"/>
-            <a:ext cx="1983740" cy="257175"/>
+            <a:ext cx="2002155" cy="575945"/>
           </a:xfrm>
           <a:prstGeom prst="rect">
             <a:avLst/>
@@ -8416,7 +8176,7 @@
                 <a:ea typeface="微软雅黑" panose="020B0503020204020204" charset="-122"/>
                 <a:cs typeface="微软雅黑" panose="020B0503020204020204" charset="-122"/>
               </a:rPr>
-              <a:t>海杂波尾部强度、可感知边界</a:t>
+              <a:t>海杂波尾部强度</a:t>
             </a:r>
             <a:endParaRPr sz="1200" b="0">
               <a:solidFill>
@@ -8526,8 +8286,8 @@
         </p:nvSpPr>
         <p:spPr>
           <a:xfrm>
-            <a:off x="4029075" y="5915025"/>
-            <a:ext cx="1562100" cy="257175"/>
+            <a:off x="3966845" y="5915025"/>
+            <a:ext cx="1767840" cy="609600"/>
           </a:xfrm>
           <a:prstGeom prst="rect">
             <a:avLst/>
@@ -8737,7 +8497,7 @@
                 <a:ea typeface="微软雅黑" panose="020B0503020204020204" charset="-122"/>
                 <a:cs typeface="微软雅黑" panose="020B0503020204020204" charset="-122"/>
               </a:rPr>
-              <a:t>辐射特征、调制/循环参数</a:t>
+              <a:t>辐射特征</a:t>
             </a:r>
             <a:endParaRPr sz="1200" b="0">
               <a:solidFill>
@@ -8878,8 +8638,8 @@
         </p:nvSpPr>
         <p:spPr>
           <a:xfrm>
-            <a:off x="8225790" y="5915025"/>
-            <a:ext cx="1562100" cy="257175"/>
+            <a:off x="8029575" y="5915025"/>
+            <a:ext cx="1862455" cy="589915"/>
           </a:xfrm>
           <a:prstGeom prst="rect">
             <a:avLst/>
@@ -9042,6 +8802,54 @@
           </a:p>
         </p:txBody>
       </p:sp>
+      <p:pic>
+        <p:nvPicPr>
+          <p:cNvPr id="3" name="图片 2"/>
+          <p:cNvPicPr>
+            <a:picLocks noChangeAspect="1"/>
+          </p:cNvPicPr>
+          <p:nvPr/>
+        </p:nvPicPr>
+        <p:blipFill>
+          <a:blip r:embed="rId1"/>
+          <a:stretch>
+            <a:fillRect/>
+          </a:stretch>
+        </p:blipFill>
+        <p:spPr>
+          <a:xfrm>
+            <a:off x="1771650" y="1177925"/>
+            <a:ext cx="1485900" cy="715645"/>
+          </a:xfrm>
+          <a:prstGeom prst="rect">
+            <a:avLst/>
+          </a:prstGeom>
+        </p:spPr>
+      </p:pic>
+      <p:pic>
+        <p:nvPicPr>
+          <p:cNvPr id="5" name="图片 4"/>
+          <p:cNvPicPr>
+            <a:picLocks noChangeAspect="1"/>
+          </p:cNvPicPr>
+          <p:nvPr/>
+        </p:nvPicPr>
+        <p:blipFill>
+          <a:blip r:embed="rId2"/>
+          <a:stretch>
+            <a:fillRect/>
+          </a:stretch>
+        </p:blipFill>
+        <p:spPr>
+          <a:xfrm>
+            <a:off x="3592195" y="1115695"/>
+            <a:ext cx="1113155" cy="748665"/>
+          </a:xfrm>
+          <a:prstGeom prst="rect">
+            <a:avLst/>
+          </a:prstGeom>
+        </p:spPr>
+      </p:pic>
     </p:spTree>
   </p:cSld>
   <p:clrMapOvr>
